--- a/slides/Module_08_Security.pptx
+++ b/slides/Module_08_Security.pptx
@@ -2768,7 +2768,7 @@
                   <a:srgbClr val="3A7DC9"/>
                 </a:solidFill>
               </a:rPr>
-              <a:t>Result: Predictable behaviour AND security. Intentional flexibility reduction serves both goals simultaneously.</a:t>
+              <a:t>Result: Predictable behavior AND security. Intentional flexibility reduction serves both goals simultaneously.</a:t>
             </a:r>
             <a:endParaRPr lang="en-US" sz="1000" dirty="0"/>
           </a:p>
@@ -4378,7 +4378,7 @@
                   <a:srgbClr val="7A90A8"/>
                 </a:solidFill>
               </a:rPr>
-              <a:t>Work through the slide 9 checklist for your agent. Which boxes can you check today? Which require new infrastructure? Prioritise the top 3 gaps.</a:t>
+              <a:t>Work through the slide 9 checklist for your agent. Which boxes can you check today? Which require new infrastructure? Prioritize the top 3 gaps.</a:t>
             </a:r>
             <a:endParaRPr lang="en-US" sz="1050" dirty="0"/>
           </a:p>
@@ -4589,7 +4589,7 @@
                   <a:srgbClr val="D4E4F0"/>
                 </a:solidFill>
               </a:rPr>
-              <a:t>Q1.  Which OWASP GenAI threat is your organisation least prepared for today? What would remediation require?</a:t>
+              <a:t>Q1.  Which OWASP GenAI threat is your organization least prepared for today? What would remediation require?</a:t>
             </a:r>
             <a:endParaRPr lang="en-US" sz="1150" dirty="0"/>
           </a:p>
@@ -4649,7 +4649,7 @@
                   <a:srgbClr val="D4E4F0"/>
                 </a:solidFill>
               </a:rPr>
-              <a:t>Q4.  Where in your organisation would a compromised agent cause the most damage? Is that pathway protected?</a:t>
+              <a:t>Q4.  Where in your organization would a compromised agent cause the most damage? Is that pathway protected?</a:t>
             </a:r>
             <a:endParaRPr lang="en-US" sz="1150" dirty="0"/>
           </a:p>
@@ -6113,7 +6113,7 @@
                   <a:srgbClr val="D4E4F0"/>
                 </a:solidFill>
               </a:rPr>
-              <a:t>80% of IT leaders report agents acting outside expected behaviour (Strata, 2025). Legacy IAM was not designed for this scale.</a:t>
+              <a:t>80% of IT leaders report agents acting outside expected behavior (Strata, 2025). Legacy IAM was not designed for this scale.</a:t>
             </a:r>
             <a:endParaRPr lang="en-US" sz="1200" dirty="0"/>
           </a:p>
@@ -7460,7 +7460,7 @@
                   <a:srgbClr val="7A90A8"/>
                 </a:solidFill>
               </a:rPr>
-              <a:t>“Intentional flexibility reduction = more predictable behaviour + secondary security benefits”  — Spotify Engineering (Honk Part 3)</a:t>
+              <a:t>“Intentional flexibility reduction = more predictable behavior + secondary security benefits”  — Spotify Engineering (Honk Part 3)</a:t>
             </a:r>
             <a:endParaRPr lang="en-US" sz="1150" dirty="0"/>
           </a:p>
@@ -10617,7 +10617,7 @@
                   <a:srgbClr val="7A90A8"/>
                 </a:solidFill>
               </a:rPr>
-              <a:t>Terminate agent container. Revoke all credentials. Quarantine the agent namespace. Use when: unexpected behaviour detected or security incident.</a:t>
+              <a:t>Terminate agent container. Revoke all credentials. Quarantine the agent namespace. Use when: unexpected behavior detected or security incident.</a:t>
             </a:r>
             <a:endParaRPr lang="en-US" sz="1050" dirty="0"/>
           </a:p>
@@ -13862,7 +13862,7 @@
                   <a:srgbClr val="1E2D3D"/>
                 </a:solidFill>
               </a:rPr>
-              <a:t>Binary allowlist minimised?</a:t>
+              <a:t>Binary allowlist minimized?</a:t>
             </a:r>
             <a:endParaRPr lang="en-US" sz="1100" dirty="0"/>
           </a:p>
